--- a/courses/nus1/files/slides/W03.pptx
+++ b/courses/nus1/files/slides/W03.pptx
@@ -7045,7 +7045,7 @@
                 </a:pPr>
                 <a:r>
                   <a:rPr lang="de-CH" sz="1600" noProof="0" dirty="0"/>
-                  <a:t>Was Verändert sich aber?</a:t>
+                  <a:t>Was verändert sich aber?</a:t>
                 </a:r>
               </a:p>
               <a:p>
@@ -7972,7 +7972,7 @@
         <p:spPr>
           <a:xfrm>
             <a:off x="594360" y="932688"/>
-            <a:ext cx="7466018" cy="477054"/>
+            <a:ext cx="7555786" cy="477054"/>
           </a:xfrm>
           <a:prstGeom prst="rect">
             <a:avLst/>
@@ -7993,7 +7993,7 @@
                 </a:solidFill>
                 <a:latin typeface="Aptos"/>
               </a:rPr>
-              <a:t>Wie verhaltet sich das D-Feld und E-Feld?</a:t>
+              <a:t>Wie verhalten sich das D-Feld und E-Feld?</a:t>
             </a:r>
             <a:endParaRPr sz="3100" b="1" dirty="0">
               <a:solidFill>
@@ -11795,7 +11795,7 @@
         <p:spPr>
           <a:xfrm>
             <a:off x="749300" y="1630722"/>
-            <a:ext cx="3323346" cy="615553"/>
+            <a:ext cx="3316934" cy="615553"/>
           </a:xfrm>
           <a:prstGeom prst="rect">
             <a:avLst/>
@@ -11819,7 +11819,7 @@
                 </a:solidFill>
                 <a:latin typeface="Aptos"/>
               </a:rPr>
-              <a:t>Ein Teilchen mit + und – pol</a:t>
+              <a:t>Ein Teilchen mit + und – Pol</a:t>
             </a:r>
             <a:br>
               <a:rPr lang="de-CH" sz="2000" b="0" dirty="0">
@@ -13011,7 +13011,7 @@
                 </a:solidFill>
                 <a:latin typeface="Aptos"/>
               </a:rPr>
-              <a:t>Auf welche Dipole wirkte eine Kraft  </a:t>
+              <a:t>Auf welche Dipole wirkt eine Kraft  </a:t>
             </a:r>
             <a:br>
               <a:rPr lang="de-CH" sz="2000" dirty="0">
@@ -13950,7 +13950,7 @@
         <p:spPr>
           <a:xfrm>
             <a:off x="594360" y="932688"/>
-            <a:ext cx="3346557" cy="477054"/>
+            <a:ext cx="4333687" cy="477054"/>
           </a:xfrm>
           <a:prstGeom prst="rect">
             <a:avLst/>
@@ -13971,7 +13971,7 @@
                 </a:solidFill>
                 <a:latin typeface="Aptos"/>
               </a:rPr>
-              <a:t>Das wo wichtig ist:</a:t>
+              <a:t>Was wirklich wichtig ist:</a:t>
             </a:r>
             <a:endParaRPr sz="3100" b="1" dirty="0">
               <a:solidFill>
@@ -14295,7 +14295,7 @@
         <p:spPr>
           <a:xfrm>
             <a:off x="591190" y="1660179"/>
-            <a:ext cx="5806461" cy="307777"/>
+            <a:ext cx="5844229" cy="307777"/>
           </a:xfrm>
           <a:prstGeom prst="rect">
             <a:avLst/>
@@ -14316,7 +14316,7 @@
                 </a:solidFill>
                 <a:latin typeface="Aptos"/>
               </a:rPr>
-              <a:t>An sich zwei Platten wo unterschiedlich geladen sind</a:t>
+              <a:t>An sich zwei Platten, die unterschiedlich geladen sind</a:t>
             </a:r>
           </a:p>
         </p:txBody>
@@ -14421,7 +14421,7 @@
         </p:nvSpPr>
         <p:spPr>
           <a:xfrm>
-            <a:off x="4444733" y="542673"/>
+            <a:off x="7360835" y="471486"/>
             <a:ext cx="1107739" cy="307777"/>
           </a:xfrm>
           <a:prstGeom prst="rect">
@@ -14476,7 +14476,7 @@
         </p:blipFill>
         <p:spPr>
           <a:xfrm>
-            <a:off x="5749612" y="406008"/>
+            <a:off x="8665714" y="334821"/>
             <a:ext cx="1409897" cy="581106"/>
           </a:xfrm>
           <a:prstGeom prst="rect">
@@ -14506,7 +14506,7 @@
         </p:blipFill>
         <p:spPr>
           <a:xfrm>
-            <a:off x="7356649" y="511530"/>
+            <a:off x="10272751" y="440343"/>
             <a:ext cx="1657581" cy="323895"/>
           </a:xfrm>
           <a:prstGeom prst="rect">
